--- a/media/resources/files/Onduktar_Akcha_KalkulyatorsuzIshtoo_KondumA_NgjzNGT.pptx
+++ b/media/resources/files/Onduktar_Akcha_KalkulyatorsuzIshtoo_KondumA_NgjzNGT.pptx
@@ -10258,7 +10258,7 @@
                 <a:ea typeface="+mn-ea"/>
                 <a:cs typeface="+mn-cs"/>
               </a:rPr>
-              <a:t>Турдуу пикирлер учун ыраазычылык билдиребиз.</a:t>
+              <a:t>Түрдүү пикирлер үчүн ыраазычылык билдиребиз.</a:t>
             </a:r>
           </a:p>
           <a:p>

--- a/media/resources/files/Onduktar_Akcha_KalkulyatorsuzIshtoo_KondumA_NgjzNGT.pptx
+++ b/media/resources/files/Onduktar_Akcha_KalkulyatorsuzIshtoo_KondumA_NgjzNGT.pptx
@@ -1502,7 +1502,7 @@
                   <a:schemeClr val="tx1"/>
                 </a:solidFill>
               </a:rPr>
-              <a:t>132.30</a:t>
+              <a:t>132,30</a:t>
             </a:r>
             <a:r>
               <a:rPr lang="ky-KG" sz="1200" dirty="0">
@@ -1906,7 +1906,7 @@
                   <a:schemeClr val="tx1"/>
                 </a:solidFill>
               </a:rPr>
-              <a:t>59.54</a:t>
+              <a:t>59,54</a:t>
             </a:r>
             <a:r>
               <a:rPr lang="ky-KG" sz="1200" dirty="0">
@@ -1985,7 +1985,7 @@
                   <a:schemeClr val="tx1"/>
                 </a:solidFill>
               </a:rPr>
-              <a:t>86.00</a:t>
+              <a:t>86,00</a:t>
             </a:r>
             <a:r>
               <a:rPr lang="ky-KG" sz="1200" dirty="0">
@@ -2064,7 +2064,7 @@
                   <a:schemeClr val="tx1"/>
                 </a:solidFill>
               </a:rPr>
-              <a:t>145.53</a:t>
+              <a:t>145,53</a:t>
             </a:r>
             <a:r>
               <a:rPr lang="ky-KG" sz="1200" dirty="0">
@@ -2143,7 +2143,7 @@
                   <a:schemeClr val="tx1"/>
                 </a:solidFill>
               </a:rPr>
-              <a:t>159.86</a:t>
+              <a:t>159,86</a:t>
             </a:r>
             <a:r>
               <a:rPr lang="ky-KG" sz="1200" dirty="0">
@@ -2222,7 +2222,7 @@
                   <a:schemeClr val="tx1"/>
                 </a:solidFill>
               </a:rPr>
-              <a:t>93.71</a:t>
+              <a:t>93,71</a:t>
             </a:r>
             <a:r>
               <a:rPr lang="ky-KG" sz="1200" dirty="0">
@@ -2301,7 +2301,7 @@
                   <a:schemeClr val="tx1"/>
                 </a:solidFill>
               </a:rPr>
-              <a:t>132.30</a:t>
+              <a:t>132,30</a:t>
             </a:r>
             <a:r>
               <a:rPr lang="ky-KG" sz="1200" dirty="0">
@@ -2380,7 +2380,7 @@
                   <a:schemeClr val="tx1"/>
                 </a:solidFill>
               </a:rPr>
-              <a:t>37.49</a:t>
+              <a:t>37,49</a:t>
             </a:r>
             <a:r>
               <a:rPr lang="ky-KG" sz="1200" dirty="0">
@@ -2459,7 +2459,7 @@
                   <a:schemeClr val="tx1"/>
                 </a:solidFill>
               </a:rPr>
-              <a:t>71.66</a:t>
+              <a:t>71,66</a:t>
             </a:r>
             <a:r>
               <a:rPr lang="ky-KG" sz="1200" dirty="0">
@@ -3121,7 +3121,7 @@
           <a:p>
             <a:r>
               <a:rPr lang="ky-KG" sz="1600" dirty="0"/>
-              <a:t>191.84 с</a:t>
+              <a:t>191,84 с</a:t>
             </a:r>
             <a:endParaRPr lang="en-GB" sz="1600" dirty="0"/>
           </a:p>
@@ -3164,7 +3164,7 @@
           <a:p>
             <a:r>
               <a:rPr lang="ky-KG" sz="1600" dirty="0"/>
-              <a:t>217.19с</a:t>
+              <a:t>217,19с</a:t>
             </a:r>
             <a:endParaRPr lang="en-GB" sz="1600" dirty="0"/>
           </a:p>
@@ -3207,7 +3207,7 @@
           <a:p>
             <a:r>
               <a:rPr lang="ky-KG" sz="1600" dirty="0"/>
-              <a:t>245.86</a:t>
+              <a:t>245,86</a:t>
             </a:r>
             <a:endParaRPr lang="en-GB" sz="1600" dirty="0"/>
           </a:p>
@@ -3250,7 +3250,7 @@
           <a:p>
             <a:r>
               <a:rPr lang="ky-KG" sz="1600" dirty="0"/>
-              <a:t>112.47 с</a:t>
+              <a:t>112,47 с</a:t>
             </a:r>
             <a:endParaRPr lang="en-GB" sz="1600" dirty="0"/>
           </a:p>
@@ -3293,7 +3293,7 @@
           <a:p>
             <a:r>
               <a:rPr lang="ky-KG" sz="1600" dirty="0"/>
-              <a:t>226.01</a:t>
+              <a:t>226,01</a:t>
             </a:r>
             <a:endParaRPr lang="en-GB" sz="1600" dirty="0"/>
           </a:p>
@@ -3336,7 +3336,7 @@
           <a:p>
             <a:r>
               <a:rPr lang="ky-KG" sz="1600" dirty="0"/>
-              <a:t>289.96с</a:t>
+              <a:t>289,96с</a:t>
             </a:r>
             <a:endParaRPr lang="en-GB" sz="1600" dirty="0"/>
           </a:p>
@@ -3379,7 +3379,7 @@
           <a:p>
             <a:r>
               <a:rPr lang="ky-KG" sz="1600" dirty="0"/>
-              <a:t>377.05с</a:t>
+              <a:t>377,05с</a:t>
             </a:r>
             <a:endParaRPr lang="en-GB" sz="1600" dirty="0"/>
           </a:p>
@@ -3422,7 +3422,7 @@
           <a:p>
             <a:r>
               <a:rPr lang="ky-KG" sz="1600" dirty="0"/>
-              <a:t>337.37 с</a:t>
+              <a:t>337,37 с</a:t>
             </a:r>
             <a:endParaRPr lang="en-GB" sz="1600" dirty="0"/>
           </a:p>
@@ -3680,7 +3680,7 @@
                   <a:schemeClr val="tx1"/>
                 </a:solidFill>
               </a:rPr>
-              <a:t>132.30</a:t>
+              <a:t>132,30</a:t>
             </a:r>
             <a:r>
               <a:rPr lang="ky-KG" sz="1200" dirty="0">
@@ -4084,7 +4084,7 @@
                   <a:schemeClr val="tx1"/>
                 </a:solidFill>
               </a:rPr>
-              <a:t>59.54</a:t>
+              <a:t>59,54</a:t>
             </a:r>
             <a:r>
               <a:rPr lang="ky-KG" sz="1200" dirty="0">
@@ -4163,7 +4163,7 @@
                   <a:schemeClr val="tx1"/>
                 </a:solidFill>
               </a:rPr>
-              <a:t>86.00</a:t>
+              <a:t>86,00</a:t>
             </a:r>
             <a:r>
               <a:rPr lang="ky-KG" sz="1200" dirty="0">
@@ -4242,7 +4242,7 @@
                   <a:schemeClr val="tx1"/>
                 </a:solidFill>
               </a:rPr>
-              <a:t>145.53</a:t>
+              <a:t>145,53</a:t>
             </a:r>
             <a:r>
               <a:rPr lang="ky-KG" sz="1200" dirty="0">
@@ -4321,7 +4321,7 @@
                   <a:schemeClr val="tx1"/>
                 </a:solidFill>
               </a:rPr>
-              <a:t>159.86</a:t>
+              <a:t>159,86</a:t>
             </a:r>
             <a:r>
               <a:rPr lang="ky-KG" sz="1200" dirty="0">
@@ -4400,7 +4400,7 @@
                   <a:schemeClr val="tx1"/>
                 </a:solidFill>
               </a:rPr>
-              <a:t>93.71</a:t>
+              <a:t>93,71</a:t>
             </a:r>
             <a:r>
               <a:rPr lang="ky-KG" sz="1200" dirty="0">
@@ -4479,7 +4479,7 @@
                   <a:schemeClr val="tx1"/>
                 </a:solidFill>
               </a:rPr>
-              <a:t>132.30</a:t>
+              <a:t>132,30</a:t>
             </a:r>
             <a:r>
               <a:rPr lang="ky-KG" sz="1200" dirty="0">
@@ -4558,7 +4558,7 @@
                   <a:schemeClr val="tx1"/>
                 </a:solidFill>
               </a:rPr>
-              <a:t>37.49</a:t>
+              <a:t>37,49</a:t>
             </a:r>
             <a:r>
               <a:rPr lang="ky-KG" sz="1200" dirty="0">
@@ -4637,7 +4637,7 @@
                   <a:schemeClr val="tx1"/>
                 </a:solidFill>
               </a:rPr>
-              <a:t>71.66</a:t>
+              <a:t>71,66</a:t>
             </a:r>
             <a:r>
               <a:rPr lang="ky-KG" sz="1200" dirty="0">
@@ -4728,7 +4728,7 @@
           <a:p>
             <a:r>
               <a:rPr lang="ky-KG" sz="1600" dirty="0"/>
-              <a:t>191.84 с</a:t>
+              <a:t>191,84 с</a:t>
             </a:r>
             <a:endParaRPr lang="en-GB" sz="1600" dirty="0"/>
           </a:p>
@@ -5102,7 +5102,7 @@
           <a:p>
             <a:r>
               <a:rPr lang="ky-KG" sz="1600" dirty="0"/>
-              <a:t>191.84 с</a:t>
+              <a:t>191,84 с</a:t>
             </a:r>
             <a:endParaRPr lang="en-GB" sz="1600" dirty="0"/>
           </a:p>
@@ -5145,7 +5145,7 @@
           <a:p>
             <a:r>
               <a:rPr lang="ky-KG" sz="1600" dirty="0"/>
-              <a:t>217.19с</a:t>
+              <a:t>217,19с</a:t>
             </a:r>
             <a:endParaRPr lang="en-GB" sz="1600" dirty="0"/>
           </a:p>
@@ -5188,7 +5188,7 @@
           <a:p>
             <a:r>
               <a:rPr lang="ky-KG" sz="1600" dirty="0"/>
-              <a:t>245.86</a:t>
+              <a:t>245,86</a:t>
             </a:r>
             <a:endParaRPr lang="en-GB" sz="1600" dirty="0"/>
           </a:p>
@@ -5231,7 +5231,7 @@
           <a:p>
             <a:r>
               <a:rPr lang="ky-KG" sz="1600" dirty="0"/>
-              <a:t>112.47 с</a:t>
+              <a:t>112,47 с</a:t>
             </a:r>
             <a:endParaRPr lang="en-GB" sz="1600" dirty="0"/>
           </a:p>
@@ -5274,7 +5274,7 @@
           <a:p>
             <a:r>
               <a:rPr lang="ky-KG" sz="1600" dirty="0"/>
-              <a:t>226.01</a:t>
+              <a:t>226,01</a:t>
             </a:r>
             <a:endParaRPr lang="en-GB" sz="1600" dirty="0"/>
           </a:p>
@@ -5317,7 +5317,7 @@
           <a:p>
             <a:r>
               <a:rPr lang="ky-KG" sz="1600" dirty="0"/>
-              <a:t>289.96с</a:t>
+              <a:t>289,96с</a:t>
             </a:r>
             <a:endParaRPr lang="en-GB" sz="1600" dirty="0"/>
           </a:p>
@@ -5360,7 +5360,7 @@
           <a:p>
             <a:r>
               <a:rPr lang="ky-KG" sz="1600" dirty="0"/>
-              <a:t>377.05с</a:t>
+              <a:t>377,05с</a:t>
             </a:r>
             <a:endParaRPr lang="en-GB" sz="1600" dirty="0"/>
           </a:p>
@@ -5403,7 +5403,7 @@
           <a:p>
             <a:r>
               <a:rPr lang="ky-KG" sz="1600" dirty="0"/>
-              <a:t>337.37 с</a:t>
+              <a:t>337,37 с</a:t>
             </a:r>
             <a:endParaRPr lang="en-GB" sz="1600" dirty="0"/>
           </a:p>
@@ -5600,7 +5600,7 @@
                   <a:schemeClr val="tx1"/>
                 </a:solidFill>
               </a:rPr>
-              <a:t>132.30</a:t>
+              <a:t>132,30</a:t>
             </a:r>
             <a:r>
               <a:rPr lang="ky-KG" sz="1200" dirty="0">
@@ -6004,7 +6004,7 @@
                   <a:schemeClr val="tx1"/>
                 </a:solidFill>
               </a:rPr>
-              <a:t>59.54</a:t>
+              <a:t>59,54</a:t>
             </a:r>
             <a:r>
               <a:rPr lang="ky-KG" sz="1200" dirty="0">
@@ -6083,7 +6083,7 @@
                   <a:schemeClr val="tx1"/>
                 </a:solidFill>
               </a:rPr>
-              <a:t>86.00</a:t>
+              <a:t>86,00</a:t>
             </a:r>
             <a:r>
               <a:rPr lang="ky-KG" sz="1200" dirty="0">
@@ -6162,7 +6162,7 @@
                   <a:schemeClr val="tx1"/>
                 </a:solidFill>
               </a:rPr>
-              <a:t>145.53</a:t>
+              <a:t>145,53</a:t>
             </a:r>
             <a:r>
               <a:rPr lang="ky-KG" sz="1200" dirty="0">
@@ -6241,7 +6241,7 @@
                   <a:schemeClr val="tx1"/>
                 </a:solidFill>
               </a:rPr>
-              <a:t>159.86</a:t>
+              <a:t>159,86</a:t>
             </a:r>
             <a:r>
               <a:rPr lang="ky-KG" sz="1200" dirty="0">
@@ -6320,7 +6320,7 @@
                   <a:schemeClr val="tx1"/>
                 </a:solidFill>
               </a:rPr>
-              <a:t>93.71</a:t>
+              <a:t>93,71</a:t>
             </a:r>
             <a:r>
               <a:rPr lang="ky-KG" sz="1200" dirty="0">
@@ -6399,7 +6399,7 @@
                   <a:schemeClr val="tx1"/>
                 </a:solidFill>
               </a:rPr>
-              <a:t>132.30</a:t>
+              <a:t>132,30</a:t>
             </a:r>
             <a:r>
               <a:rPr lang="ky-KG" sz="1200" dirty="0">
@@ -6478,7 +6478,7 @@
                   <a:schemeClr val="tx1"/>
                 </a:solidFill>
               </a:rPr>
-              <a:t>37.49</a:t>
+              <a:t>37,49</a:t>
             </a:r>
             <a:r>
               <a:rPr lang="ky-KG" sz="1200" dirty="0">
@@ -6557,7 +6557,7 @@
                   <a:schemeClr val="tx1"/>
                 </a:solidFill>
               </a:rPr>
-              <a:t>71.66</a:t>
+              <a:t>71,66</a:t>
             </a:r>
             <a:r>
               <a:rPr lang="ky-KG" sz="1200" dirty="0">
@@ -6648,7 +6648,7 @@
           <a:p>
             <a:r>
               <a:rPr lang="ky-KG" sz="1600" dirty="0"/>
-              <a:t>456.46 с</a:t>
+              <a:t>456,46 с</a:t>
             </a:r>
             <a:endParaRPr lang="en-GB" sz="1600" dirty="0"/>
           </a:p>
@@ -6691,7 +6691,7 @@
           <a:p>
             <a:r>
               <a:rPr lang="ky-KG" sz="1600" dirty="0"/>
-              <a:t>383.68 с</a:t>
+              <a:t>383,68 с</a:t>
             </a:r>
             <a:endParaRPr lang="en-GB" sz="1600" dirty="0"/>
           </a:p>
@@ -6734,7 +6734,7 @@
           <a:p>
             <a:r>
               <a:rPr lang="ky-KG" sz="1600" dirty="0"/>
-              <a:t>330.74 с</a:t>
+              <a:t>330,74 с</a:t>
             </a:r>
             <a:endParaRPr lang="en-GB" sz="1600" dirty="0"/>
           </a:p>
@@ -6777,7 +6777,7 @@
           <a:p>
             <a:r>
               <a:rPr lang="ky-KG" sz="1600" dirty="0"/>
-              <a:t>598.78 с</a:t>
+              <a:t>598,78 с</a:t>
             </a:r>
             <a:endParaRPr lang="en-GB" sz="1600" dirty="0"/>
           </a:p>
@@ -6820,7 +6820,7 @@
           <a:p>
             <a:r>
               <a:rPr lang="ky-KG" sz="1600" dirty="0"/>
-              <a:t>339.58с</a:t>
+              <a:t>339,58с</a:t>
             </a:r>
             <a:endParaRPr lang="en-GB" sz="1600" dirty="0"/>
           </a:p>
@@ -6863,7 +6863,7 @@
           <a:p>
             <a:r>
               <a:rPr lang="ky-KG" sz="1600" dirty="0"/>
-              <a:t>281.12 с</a:t>
+              <a:t>281,12 с</a:t>
             </a:r>
             <a:endParaRPr lang="en-GB" sz="1600" dirty="0"/>
           </a:p>
@@ -6906,7 +6906,7 @@
           <a:p>
             <a:r>
               <a:rPr lang="ky-KG" sz="1600" dirty="0"/>
-              <a:t>701.19 с</a:t>
+              <a:t>701,19 с</a:t>
             </a:r>
             <a:endParaRPr lang="en-GB" sz="1600" dirty="0"/>
           </a:p>
@@ -6949,7 +6949,7 @@
           <a:p>
             <a:r>
               <a:rPr lang="ky-KG" sz="1600" dirty="0"/>
-              <a:t>374.84 с</a:t>
+              <a:t>374,84 с</a:t>
             </a:r>
             <a:endParaRPr lang="en-GB" sz="1600" dirty="0"/>
           </a:p>
@@ -7176,7 +7176,7 @@
                   <a:schemeClr val="tx1"/>
                 </a:solidFill>
               </a:rPr>
-              <a:t>132.30</a:t>
+              <a:t>132,30</a:t>
             </a:r>
             <a:r>
               <a:rPr lang="ky-KG" sz="1200" dirty="0">
@@ -7580,7 +7580,7 @@
                   <a:schemeClr val="tx1"/>
                 </a:solidFill>
               </a:rPr>
-              <a:t>59.54</a:t>
+              <a:t>59,54</a:t>
             </a:r>
             <a:r>
               <a:rPr lang="ky-KG" sz="1200" dirty="0">
@@ -7659,7 +7659,7 @@
                   <a:schemeClr val="tx1"/>
                 </a:solidFill>
               </a:rPr>
-              <a:t>86.00</a:t>
+              <a:t>86,00</a:t>
             </a:r>
             <a:r>
               <a:rPr lang="ky-KG" sz="1200" dirty="0">
@@ -7738,7 +7738,7 @@
                   <a:schemeClr val="tx1"/>
                 </a:solidFill>
               </a:rPr>
-              <a:t>145.53</a:t>
+              <a:t>145,53</a:t>
             </a:r>
             <a:r>
               <a:rPr lang="ky-KG" sz="1200" dirty="0">
@@ -7817,7 +7817,7 @@
                   <a:schemeClr val="tx1"/>
                 </a:solidFill>
               </a:rPr>
-              <a:t>159.86</a:t>
+              <a:t>159,86</a:t>
             </a:r>
             <a:r>
               <a:rPr lang="ky-KG" sz="1200" dirty="0">
@@ -7896,7 +7896,7 @@
                   <a:schemeClr val="tx1"/>
                 </a:solidFill>
               </a:rPr>
-              <a:t>93.71</a:t>
+              <a:t>93,71</a:t>
             </a:r>
             <a:r>
               <a:rPr lang="ky-KG" sz="1200" dirty="0">
@@ -7975,7 +7975,7 @@
                   <a:schemeClr val="tx1"/>
                 </a:solidFill>
               </a:rPr>
-              <a:t>132.30</a:t>
+              <a:t>132,30</a:t>
             </a:r>
             <a:r>
               <a:rPr lang="ky-KG" sz="1200" dirty="0">
@@ -8054,7 +8054,7 @@
                   <a:schemeClr val="tx1"/>
                 </a:solidFill>
               </a:rPr>
-              <a:t>37.49</a:t>
+              <a:t>37,49</a:t>
             </a:r>
             <a:r>
               <a:rPr lang="ky-KG" sz="1200" dirty="0">
@@ -8133,7 +8133,7 @@
                   <a:schemeClr val="tx1"/>
                 </a:solidFill>
               </a:rPr>
-              <a:t>71.66</a:t>
+              <a:t>71,66</a:t>
             </a:r>
             <a:r>
               <a:rPr lang="ky-KG" sz="1200" dirty="0">
@@ -8618,7 +8618,7 @@
                   <a:schemeClr val="tx1"/>
                 </a:solidFill>
               </a:rPr>
-              <a:t>132.30</a:t>
+              <a:t>132,30</a:t>
             </a:r>
             <a:r>
               <a:rPr lang="ky-KG" sz="1200" dirty="0">
@@ -9022,7 +9022,7 @@
                   <a:schemeClr val="tx1"/>
                 </a:solidFill>
               </a:rPr>
-              <a:t>59.54</a:t>
+              <a:t>59,54</a:t>
             </a:r>
             <a:r>
               <a:rPr lang="ky-KG" sz="1200" dirty="0">
@@ -9101,7 +9101,7 @@
                   <a:schemeClr val="tx1"/>
                 </a:solidFill>
               </a:rPr>
-              <a:t>86.00</a:t>
+              <a:t>86,00</a:t>
             </a:r>
             <a:r>
               <a:rPr lang="ky-KG" sz="1200" dirty="0">
@@ -9180,7 +9180,7 @@
                   <a:schemeClr val="tx1"/>
                 </a:solidFill>
               </a:rPr>
-              <a:t>145.53</a:t>
+              <a:t>145,53</a:t>
             </a:r>
             <a:r>
               <a:rPr lang="ky-KG" sz="1200" dirty="0">
@@ -9259,7 +9259,7 @@
                   <a:schemeClr val="tx1"/>
                 </a:solidFill>
               </a:rPr>
-              <a:t>159.86</a:t>
+              <a:t>159,86</a:t>
             </a:r>
             <a:r>
               <a:rPr lang="ky-KG" sz="1200" dirty="0">
@@ -9338,7 +9338,7 @@
                   <a:schemeClr val="tx1"/>
                 </a:solidFill>
               </a:rPr>
-              <a:t>93.71</a:t>
+              <a:t>93,71</a:t>
             </a:r>
             <a:r>
               <a:rPr lang="ky-KG" sz="1200" dirty="0">
@@ -9417,7 +9417,7 @@
                   <a:schemeClr val="tx1"/>
                 </a:solidFill>
               </a:rPr>
-              <a:t>132.30</a:t>
+              <a:t>132,30</a:t>
             </a:r>
             <a:r>
               <a:rPr lang="ky-KG" sz="1200" dirty="0">
@@ -9496,7 +9496,7 @@
                   <a:schemeClr val="tx1"/>
                 </a:solidFill>
               </a:rPr>
-              <a:t>37.49</a:t>
+              <a:t>37,49</a:t>
             </a:r>
             <a:r>
               <a:rPr lang="ky-KG" sz="1200" dirty="0">
@@ -9575,7 +9575,7 @@
                   <a:schemeClr val="tx1"/>
                 </a:solidFill>
               </a:rPr>
-              <a:t>71.66</a:t>
+              <a:t>71,66</a:t>
             </a:r>
             <a:r>
               <a:rPr lang="ky-KG" sz="1200" dirty="0">
